--- a/class/cloud_infra_mgmt/04주차_Kubernetes개념/01_강의자료/3차시_Deployment작성과배포.pptx
+++ b/class/cloud_infra_mgmt/04주차_Kubernetes개념/01_강의자료/3차시_Deployment작성과배포.pptx
@@ -5199,7 +5199,7 @@
           <a:p>
             <a:pPr>
               <a:lnSpc>
-                <a:spcPct val="115000"/>
+                <a:spcPct val="149500"/>
               </a:lnSpc>
             </a:pPr>
             <a:r>
@@ -5224,7 +5224,7 @@
           <a:p>
             <a:pPr>
               <a:lnSpc>
-                <a:spcPct val="115000"/>
+                <a:spcPct val="149500"/>
               </a:lnSpc>
             </a:pPr>
             <a:r>
@@ -5249,7 +5249,7 @@
           <a:p>
             <a:pPr>
               <a:lnSpc>
-                <a:spcPct val="115000"/>
+                <a:spcPct val="149500"/>
               </a:lnSpc>
             </a:pPr>
             <a:r>
@@ -5274,7 +5274,7 @@
           <a:p>
             <a:pPr>
               <a:lnSpc>
-                <a:spcPct val="115000"/>
+                <a:spcPct val="149500"/>
               </a:lnSpc>
             </a:pPr>
             <a:r>
@@ -6782,16 +6782,104 @@
       </p:sp>
       <p:sp>
         <p:nvSpPr>
-          <p:cNvPr id="7" name="Isosceles Triangle 6"/>
+          <p:cNvPr id="7" name="Rectangle 6"/>
           <p:cNvSpPr/>
           <p:nvPr/>
         </p:nvSpPr>
         <p:spPr>
-          <a:xfrm rot="5400000">
-            <a:off x="3495751" y="1673352"/>
-            <a:ext cx="146304" cy="146304"/>
-          </a:xfrm>
-          <a:prstGeom prst="triangle">
+          <a:xfrm>
+            <a:off x="5096865" y="1730959"/>
+            <a:ext cx="1995220" cy="31089"/>
+          </a:xfrm>
+          <a:prstGeom prst="rect">
+            <a:avLst/>
+          </a:prstGeom>
+          <a:solidFill>
+            <a:srgbClr val="14B8A6"/>
+          </a:solidFill>
+          <a:ln>
+            <a:noFill/>
+          </a:ln>
+          <a:effectLst/>
+        </p:spPr>
+        <p:style>
+          <a:lnRef idx="1">
+            <a:schemeClr val="accent1"/>
+          </a:lnRef>
+          <a:fillRef idx="3">
+            <a:schemeClr val="accent1"/>
+          </a:fillRef>
+          <a:effectRef idx="2">
+            <a:schemeClr val="accent1"/>
+          </a:effectRef>
+          <a:fontRef idx="minor">
+            <a:schemeClr val="lt1"/>
+          </a:fontRef>
+        </p:style>
+        <p:txBody>
+          <a:bodyPr rtlCol="0" anchor="ctr"/>
+          <a:lstStyle/>
+          <a:p>
+            <a:pPr algn="ctr"/>
+          </a:p>
+        </p:txBody>
+      </p:sp>
+      <p:sp>
+        <p:nvSpPr>
+          <p:cNvPr id="8" name="Rectangle 7"/>
+          <p:cNvSpPr/>
+          <p:nvPr/>
+        </p:nvSpPr>
+        <p:spPr>
+          <a:xfrm>
+            <a:off x="7622438" y="1730959"/>
+            <a:ext cx="1995220" cy="31089"/>
+          </a:xfrm>
+          <a:prstGeom prst="rect">
+            <a:avLst/>
+          </a:prstGeom>
+          <a:solidFill>
+            <a:srgbClr val="14B8A6"/>
+          </a:solidFill>
+          <a:ln>
+            <a:noFill/>
+          </a:ln>
+          <a:effectLst/>
+        </p:spPr>
+        <p:style>
+          <a:lnRef idx="1">
+            <a:schemeClr val="accent1"/>
+          </a:lnRef>
+          <a:fillRef idx="3">
+            <a:schemeClr val="accent1"/>
+          </a:fillRef>
+          <a:effectRef idx="2">
+            <a:schemeClr val="accent1"/>
+          </a:effectRef>
+          <a:fontRef idx="minor">
+            <a:schemeClr val="lt1"/>
+          </a:fontRef>
+        </p:style>
+        <p:txBody>
+          <a:bodyPr rtlCol="0" anchor="ctr"/>
+          <a:lstStyle/>
+          <a:p>
+            <a:pPr algn="ctr"/>
+          </a:p>
+        </p:txBody>
+      </p:sp>
+      <p:sp>
+        <p:nvSpPr>
+          <p:cNvPr id="9" name="Oval 8"/>
+          <p:cNvSpPr/>
+          <p:nvPr/>
+        </p:nvSpPr>
+        <p:spPr>
+          <a:xfrm>
+            <a:off x="2040940" y="1481328"/>
+            <a:ext cx="530352" cy="530352"/>
+          </a:xfrm>
+          <a:prstGeom prst="ellipse">
             <a:avLst/>
           </a:prstGeom>
           <a:solidFill>
@@ -6826,227 +6914,7 @@
       </p:sp>
       <p:sp>
         <p:nvSpPr>
-          <p:cNvPr id="8" name="Rectangle 7"/>
-          <p:cNvSpPr/>
-          <p:nvPr/>
-        </p:nvSpPr>
-        <p:spPr>
-          <a:xfrm>
-            <a:off x="5096865" y="1730959"/>
-            <a:ext cx="1995220" cy="31089"/>
-          </a:xfrm>
-          <a:prstGeom prst="rect">
-            <a:avLst/>
-          </a:prstGeom>
-          <a:solidFill>
-            <a:srgbClr val="14B8A6"/>
-          </a:solidFill>
-          <a:ln>
-            <a:noFill/>
-          </a:ln>
-          <a:effectLst/>
-        </p:spPr>
-        <p:style>
-          <a:lnRef idx="1">
-            <a:schemeClr val="accent1"/>
-          </a:lnRef>
-          <a:fillRef idx="3">
-            <a:schemeClr val="accent1"/>
-          </a:fillRef>
-          <a:effectRef idx="2">
-            <a:schemeClr val="accent1"/>
-          </a:effectRef>
-          <a:fontRef idx="minor">
-            <a:schemeClr val="lt1"/>
-          </a:fontRef>
-        </p:style>
-        <p:txBody>
-          <a:bodyPr rtlCol="0" anchor="ctr"/>
-          <a:lstStyle/>
-          <a:p>
-            <a:pPr algn="ctr"/>
-          </a:p>
-        </p:txBody>
-      </p:sp>
-      <p:sp>
-        <p:nvSpPr>
-          <p:cNvPr id="9" name="Isosceles Triangle 8"/>
-          <p:cNvSpPr/>
-          <p:nvPr/>
-        </p:nvSpPr>
-        <p:spPr>
-          <a:xfrm rot="5400000">
-            <a:off x="6021324" y="1673352"/>
-            <a:ext cx="146304" cy="146304"/>
-          </a:xfrm>
-          <a:prstGeom prst="triangle">
-            <a:avLst/>
-          </a:prstGeom>
-          <a:solidFill>
-            <a:srgbClr val="0D9488"/>
-          </a:solidFill>
-          <a:ln>
-            <a:noFill/>
-          </a:ln>
-          <a:effectLst/>
-        </p:spPr>
-        <p:style>
-          <a:lnRef idx="1">
-            <a:schemeClr val="accent1"/>
-          </a:lnRef>
-          <a:fillRef idx="3">
-            <a:schemeClr val="accent1"/>
-          </a:fillRef>
-          <a:effectRef idx="2">
-            <a:schemeClr val="accent1"/>
-          </a:effectRef>
-          <a:fontRef idx="minor">
-            <a:schemeClr val="lt1"/>
-          </a:fontRef>
-        </p:style>
-        <p:txBody>
-          <a:bodyPr rtlCol="0" anchor="ctr"/>
-          <a:lstStyle/>
-          <a:p>
-            <a:pPr algn="ctr"/>
-          </a:p>
-        </p:txBody>
-      </p:sp>
-      <p:sp>
-        <p:nvSpPr>
-          <p:cNvPr id="10" name="Rectangle 9"/>
-          <p:cNvSpPr/>
-          <p:nvPr/>
-        </p:nvSpPr>
-        <p:spPr>
-          <a:xfrm>
-            <a:off x="7622438" y="1730959"/>
-            <a:ext cx="1995220" cy="31089"/>
-          </a:xfrm>
-          <a:prstGeom prst="rect">
-            <a:avLst/>
-          </a:prstGeom>
-          <a:solidFill>
-            <a:srgbClr val="14B8A6"/>
-          </a:solidFill>
-          <a:ln>
-            <a:noFill/>
-          </a:ln>
-          <a:effectLst/>
-        </p:spPr>
-        <p:style>
-          <a:lnRef idx="1">
-            <a:schemeClr val="accent1"/>
-          </a:lnRef>
-          <a:fillRef idx="3">
-            <a:schemeClr val="accent1"/>
-          </a:fillRef>
-          <a:effectRef idx="2">
-            <a:schemeClr val="accent1"/>
-          </a:effectRef>
-          <a:fontRef idx="minor">
-            <a:schemeClr val="lt1"/>
-          </a:fontRef>
-        </p:style>
-        <p:txBody>
-          <a:bodyPr rtlCol="0" anchor="ctr"/>
-          <a:lstStyle/>
-          <a:p>
-            <a:pPr algn="ctr"/>
-          </a:p>
-        </p:txBody>
-      </p:sp>
-      <p:sp>
-        <p:nvSpPr>
-          <p:cNvPr id="11" name="Isosceles Triangle 10"/>
-          <p:cNvSpPr/>
-          <p:nvPr/>
-        </p:nvSpPr>
-        <p:spPr>
-          <a:xfrm rot="5400000">
-            <a:off x="8546896" y="1673352"/>
-            <a:ext cx="146304" cy="146304"/>
-          </a:xfrm>
-          <a:prstGeom prst="triangle">
-            <a:avLst/>
-          </a:prstGeom>
-          <a:solidFill>
-            <a:srgbClr val="0D9488"/>
-          </a:solidFill>
-          <a:ln>
-            <a:noFill/>
-          </a:ln>
-          <a:effectLst/>
-        </p:spPr>
-        <p:style>
-          <a:lnRef idx="1">
-            <a:schemeClr val="accent1"/>
-          </a:lnRef>
-          <a:fillRef idx="3">
-            <a:schemeClr val="accent1"/>
-          </a:fillRef>
-          <a:effectRef idx="2">
-            <a:schemeClr val="accent1"/>
-          </a:effectRef>
-          <a:fontRef idx="minor">
-            <a:schemeClr val="lt1"/>
-          </a:fontRef>
-        </p:style>
-        <p:txBody>
-          <a:bodyPr rtlCol="0" anchor="ctr"/>
-          <a:lstStyle/>
-          <a:p>
-            <a:pPr algn="ctr"/>
-          </a:p>
-        </p:txBody>
-      </p:sp>
-      <p:sp>
-        <p:nvSpPr>
-          <p:cNvPr id="12" name="Oval 11"/>
-          <p:cNvSpPr/>
-          <p:nvPr/>
-        </p:nvSpPr>
-        <p:spPr>
-          <a:xfrm>
-            <a:off x="2040940" y="1481328"/>
-            <a:ext cx="530352" cy="530352"/>
-          </a:xfrm>
-          <a:prstGeom prst="ellipse">
-            <a:avLst/>
-          </a:prstGeom>
-          <a:solidFill>
-            <a:srgbClr val="0D9488"/>
-          </a:solidFill>
-          <a:ln>
-            <a:noFill/>
-          </a:ln>
-          <a:effectLst/>
-        </p:spPr>
-        <p:style>
-          <a:lnRef idx="1">
-            <a:schemeClr val="accent1"/>
-          </a:lnRef>
-          <a:fillRef idx="3">
-            <a:schemeClr val="accent1"/>
-          </a:fillRef>
-          <a:effectRef idx="2">
-            <a:schemeClr val="accent1"/>
-          </a:effectRef>
-          <a:fontRef idx="minor">
-            <a:schemeClr val="lt1"/>
-          </a:fontRef>
-        </p:style>
-        <p:txBody>
-          <a:bodyPr rtlCol="0" anchor="ctr"/>
-          <a:lstStyle/>
-          <a:p>
-            <a:pPr algn="ctr"/>
-          </a:p>
-        </p:txBody>
-      </p:sp>
-      <p:sp>
-        <p:nvSpPr>
-          <p:cNvPr id="13" name="TextBox 12"/>
+          <p:cNvPr id="10" name="TextBox 9"/>
           <p:cNvSpPr txBox="1"/>
           <p:nvPr/>
         </p:nvSpPr>
@@ -7081,7 +6949,7 @@
       </p:sp>
       <p:sp>
         <p:nvSpPr>
-          <p:cNvPr id="14" name="Rounded Rectangle 13"/>
+          <p:cNvPr id="11" name="Rounded Rectangle 10"/>
           <p:cNvSpPr/>
           <p:nvPr/>
         </p:nvSpPr>
@@ -7129,7 +6997,7 @@
       </p:sp>
       <p:sp>
         <p:nvSpPr>
-          <p:cNvPr id="15" name="TextBox 14"/>
+          <p:cNvPr id="12" name="TextBox 11"/>
           <p:cNvSpPr txBox="1"/>
           <p:nvPr/>
         </p:nvSpPr>
@@ -7164,7 +7032,7 @@
       </p:sp>
       <p:sp>
         <p:nvSpPr>
-          <p:cNvPr id="16" name="TextBox 15"/>
+          <p:cNvPr id="13" name="TextBox 12"/>
           <p:cNvSpPr txBox="1"/>
           <p:nvPr/>
         </p:nvSpPr>
@@ -7203,7 +7071,7 @@
       </p:sp>
       <p:sp>
         <p:nvSpPr>
-          <p:cNvPr id="17" name="Oval 16"/>
+          <p:cNvPr id="14" name="Oval 13"/>
           <p:cNvSpPr/>
           <p:nvPr/>
         </p:nvSpPr>
@@ -7247,7 +7115,7 @@
       </p:sp>
       <p:sp>
         <p:nvSpPr>
-          <p:cNvPr id="18" name="TextBox 17"/>
+          <p:cNvPr id="15" name="TextBox 14"/>
           <p:cNvSpPr txBox="1"/>
           <p:nvPr/>
         </p:nvSpPr>
@@ -7282,7 +7150,7 @@
       </p:sp>
       <p:sp>
         <p:nvSpPr>
-          <p:cNvPr id="19" name="Rounded Rectangle 18"/>
+          <p:cNvPr id="16" name="Rounded Rectangle 15"/>
           <p:cNvSpPr/>
           <p:nvPr/>
         </p:nvSpPr>
@@ -7330,7 +7198,7 @@
       </p:sp>
       <p:sp>
         <p:nvSpPr>
-          <p:cNvPr id="20" name="TextBox 19"/>
+          <p:cNvPr id="17" name="TextBox 16"/>
           <p:cNvSpPr txBox="1"/>
           <p:nvPr/>
         </p:nvSpPr>
@@ -7365,7 +7233,7 @@
       </p:sp>
       <p:sp>
         <p:nvSpPr>
-          <p:cNvPr id="21" name="TextBox 20"/>
+          <p:cNvPr id="18" name="TextBox 17"/>
           <p:cNvSpPr txBox="1"/>
           <p:nvPr/>
         </p:nvSpPr>
@@ -7404,7 +7272,7 @@
       </p:sp>
       <p:sp>
         <p:nvSpPr>
-          <p:cNvPr id="22" name="Oval 21"/>
+          <p:cNvPr id="19" name="Oval 18"/>
           <p:cNvSpPr/>
           <p:nvPr/>
         </p:nvSpPr>
@@ -7448,7 +7316,7 @@
       </p:sp>
       <p:sp>
         <p:nvSpPr>
-          <p:cNvPr id="23" name="TextBox 22"/>
+          <p:cNvPr id="20" name="TextBox 19"/>
           <p:cNvSpPr txBox="1"/>
           <p:nvPr/>
         </p:nvSpPr>
@@ -7483,7 +7351,7 @@
       </p:sp>
       <p:sp>
         <p:nvSpPr>
-          <p:cNvPr id="24" name="Rounded Rectangle 23"/>
+          <p:cNvPr id="21" name="Rounded Rectangle 20"/>
           <p:cNvSpPr/>
           <p:nvPr/>
         </p:nvSpPr>
@@ -7531,7 +7399,7 @@
       </p:sp>
       <p:sp>
         <p:nvSpPr>
-          <p:cNvPr id="25" name="TextBox 24"/>
+          <p:cNvPr id="22" name="TextBox 21"/>
           <p:cNvSpPr txBox="1"/>
           <p:nvPr/>
         </p:nvSpPr>
@@ -7566,7 +7434,7 @@
       </p:sp>
       <p:sp>
         <p:nvSpPr>
-          <p:cNvPr id="26" name="TextBox 25"/>
+          <p:cNvPr id="23" name="TextBox 22"/>
           <p:cNvSpPr txBox="1"/>
           <p:nvPr/>
         </p:nvSpPr>
@@ -7605,7 +7473,7 @@
       </p:sp>
       <p:sp>
         <p:nvSpPr>
-          <p:cNvPr id="27" name="Oval 26"/>
+          <p:cNvPr id="24" name="Oval 23"/>
           <p:cNvSpPr/>
           <p:nvPr/>
         </p:nvSpPr>
@@ -7649,7 +7517,7 @@
       </p:sp>
       <p:sp>
         <p:nvSpPr>
-          <p:cNvPr id="28" name="TextBox 27"/>
+          <p:cNvPr id="25" name="TextBox 24"/>
           <p:cNvSpPr txBox="1"/>
           <p:nvPr/>
         </p:nvSpPr>
@@ -7684,7 +7552,7 @@
       </p:sp>
       <p:sp>
         <p:nvSpPr>
-          <p:cNvPr id="29" name="Rounded Rectangle 28"/>
+          <p:cNvPr id="26" name="Rounded Rectangle 25"/>
           <p:cNvSpPr/>
           <p:nvPr/>
         </p:nvSpPr>
@@ -7732,7 +7600,7 @@
       </p:sp>
       <p:sp>
         <p:nvSpPr>
-          <p:cNvPr id="30" name="TextBox 29"/>
+          <p:cNvPr id="27" name="TextBox 26"/>
           <p:cNvSpPr txBox="1"/>
           <p:nvPr/>
         </p:nvSpPr>
@@ -7767,7 +7635,7 @@
       </p:sp>
       <p:sp>
         <p:nvSpPr>
-          <p:cNvPr id="31" name="TextBox 30"/>
+          <p:cNvPr id="28" name="TextBox 27"/>
           <p:cNvSpPr txBox="1"/>
           <p:nvPr/>
         </p:nvSpPr>
@@ -7806,7 +7674,7 @@
       </p:sp>
       <p:sp>
         <p:nvSpPr>
-          <p:cNvPr id="32" name="TextBox 31"/>
+          <p:cNvPr id="29" name="TextBox 28"/>
           <p:cNvSpPr txBox="1"/>
           <p:nvPr/>
         </p:nvSpPr>
@@ -7841,7 +7709,7 @@
       </p:sp>
       <p:sp>
         <p:nvSpPr>
-          <p:cNvPr id="33" name="TextBox 32"/>
+          <p:cNvPr id="30" name="TextBox 29"/>
           <p:cNvSpPr txBox="1"/>
           <p:nvPr/>
         </p:nvSpPr>
@@ -7876,7 +7744,7 @@
       </p:sp>
       <p:sp>
         <p:nvSpPr>
-          <p:cNvPr id="34" name="Rectangle 33"/>
+          <p:cNvPr id="31" name="Rectangle 30"/>
           <p:cNvSpPr/>
           <p:nvPr/>
         </p:nvSpPr>
@@ -8400,7 +8268,7 @@
           <a:p>
             <a:pPr>
               <a:lnSpc>
-                <a:spcPct val="115000"/>
+                <a:spcPct val="149500"/>
               </a:lnSpc>
             </a:pPr>
             <a:r>
@@ -8425,7 +8293,7 @@
           <a:p>
             <a:pPr>
               <a:lnSpc>
-                <a:spcPct val="115000"/>
+                <a:spcPct val="149500"/>
               </a:lnSpc>
             </a:pPr>
             <a:r>
@@ -8450,7 +8318,7 @@
           <a:p>
             <a:pPr>
               <a:lnSpc>
-                <a:spcPct val="115000"/>
+                <a:spcPct val="149500"/>
               </a:lnSpc>
             </a:pPr>
             <a:r>
@@ -9184,7 +9052,7 @@
           <a:p>
             <a:pPr>
               <a:lnSpc>
-                <a:spcPct val="115000"/>
+                <a:spcPct val="149500"/>
               </a:lnSpc>
             </a:pPr>
             <a:r>
@@ -9209,7 +9077,7 @@
           <a:p>
             <a:pPr>
               <a:lnSpc>
-                <a:spcPct val="115000"/>
+                <a:spcPct val="149500"/>
               </a:lnSpc>
             </a:pPr>
             <a:r>
@@ -9234,7 +9102,7 @@
           <a:p>
             <a:pPr>
               <a:lnSpc>
-                <a:spcPct val="115000"/>
+                <a:spcPct val="149500"/>
               </a:lnSpc>
             </a:pPr>
             <a:r>
@@ -9259,7 +9127,7 @@
           <a:p>
             <a:pPr>
               <a:lnSpc>
-                <a:spcPct val="115000"/>
+                <a:spcPct val="149500"/>
               </a:lnSpc>
             </a:pPr>
             <a:r>
@@ -9650,7 +9518,7 @@
           <a:p>
             <a:pPr>
               <a:lnSpc>
-                <a:spcPct val="115000"/>
+                <a:spcPct val="149500"/>
               </a:lnSpc>
             </a:pPr>
             <a:r>
@@ -9675,7 +9543,7 @@
           <a:p>
             <a:pPr>
               <a:lnSpc>
-                <a:spcPct val="115000"/>
+                <a:spcPct val="149500"/>
               </a:lnSpc>
             </a:pPr>
             <a:r>
@@ -9700,7 +9568,7 @@
           <a:p>
             <a:pPr>
               <a:lnSpc>
-                <a:spcPct val="115000"/>
+                <a:spcPct val="149500"/>
               </a:lnSpc>
             </a:pPr>
             <a:r>
@@ -9725,7 +9593,7 @@
           <a:p>
             <a:pPr>
               <a:lnSpc>
-                <a:spcPct val="115000"/>
+                <a:spcPct val="149500"/>
               </a:lnSpc>
             </a:pPr>
             <a:r>
@@ -9750,7 +9618,7 @@
           <a:p>
             <a:pPr>
               <a:lnSpc>
-                <a:spcPct val="115000"/>
+                <a:spcPct val="149500"/>
               </a:lnSpc>
             </a:pPr>
             <a:r>
@@ -10141,7 +10009,7 @@
           <a:p>
             <a:pPr>
               <a:lnSpc>
-                <a:spcPct val="115000"/>
+                <a:spcPct val="149500"/>
               </a:lnSpc>
             </a:pPr>
             <a:r>
@@ -10166,7 +10034,7 @@
           <a:p>
             <a:pPr>
               <a:lnSpc>
-                <a:spcPct val="115000"/>
+                <a:spcPct val="149500"/>
               </a:lnSpc>
             </a:pPr>
             <a:r>
@@ -10191,7 +10059,7 @@
           <a:p>
             <a:pPr>
               <a:lnSpc>
-                <a:spcPct val="115000"/>
+                <a:spcPct val="149500"/>
               </a:lnSpc>
             </a:pPr>
             <a:r>
@@ -10216,7 +10084,7 @@
           <a:p>
             <a:pPr>
               <a:lnSpc>
-                <a:spcPct val="115000"/>
+                <a:spcPct val="149500"/>
               </a:lnSpc>
             </a:pPr>
             <a:r>

--- a/class/cloud_infra_mgmt/04주차_Kubernetes개념/01_강의자료/3차시_Deployment작성과배포.pptx
+++ b/class/cloud_infra_mgmt/04주차_Kubernetes개념/01_강의자료/3차시_Deployment작성과배포.pptx
@@ -4835,6 +4835,8 @@
                   <a:srgbClr val="14B8A6"/>
                 </a:solidFill>
                 <a:latin typeface="맑은 고딕"/>
+                <a:ea typeface="맑은 고딕"/>
+                <a:cs typeface="맑은 고딕"/>
               </a:rPr>
               <a:t>클라우드인프라관리  ·  4주차 3차시</a:t>
             </a:r>
@@ -4870,6 +4872,8 @@
                   <a:srgbClr val="FFFFFF"/>
                 </a:solidFill>
                 <a:latin typeface="맑은 고딕"/>
+                <a:ea typeface="맑은 고딕"/>
+                <a:cs typeface="맑은 고딕"/>
               </a:rPr>
               <a:t>Deployment로 Pod 자동 관리하기</a:t>
             </a:r>
@@ -4905,6 +4909,8 @@
                   <a:srgbClr val="C9D3E6"/>
                 </a:solidFill>
                 <a:latin typeface="맑은 고딕"/>
+                <a:ea typeface="맑은 고딕"/>
+                <a:cs typeface="맑은 고딕"/>
               </a:rPr>
               <a:t>YAML 작성 · kubectl apply</a:t>
             </a:r>
@@ -4940,6 +4946,8 @@
                   <a:srgbClr val="FFFFFF"/>
                 </a:solidFill>
                 <a:latin typeface="맑은 고딕"/>
+                <a:ea typeface="맑은 고딕"/>
+                <a:cs typeface="맑은 고딕"/>
               </a:rPr>
               <a:t>영남이공대학교 김지윤교수</a:t>
             </a:r>
@@ -5099,6 +5107,8 @@
                   <a:srgbClr val="14213D"/>
                 </a:solidFill>
                 <a:latin typeface="맑은 고딕"/>
+                <a:ea typeface="맑은 고딕"/>
+                <a:cs typeface="맑은 고딕"/>
               </a:rPr>
               <a:t>03</a:t>
             </a:r>
@@ -5134,6 +5144,8 @@
                   <a:srgbClr val="14B8A6"/>
                 </a:solidFill>
                 <a:latin typeface="맑은 고딕"/>
+                <a:ea typeface="맑은 고딕"/>
+                <a:cs typeface="맑은 고딕"/>
               </a:rPr>
               <a:t>실습 안내</a:t>
             </a:r>
@@ -5169,6 +5181,8 @@
                   <a:srgbClr val="FFFFFF"/>
                 </a:solidFill>
                 <a:latin typeface="맑은 고딕"/>
+                <a:ea typeface="맑은 고딕"/>
+                <a:cs typeface="맑은 고딕"/>
               </a:rPr>
               <a:t>VM 과제 — minikube에 배포 + 자가치유 맛보기</a:t>
             </a:r>
@@ -5208,6 +5222,8 @@
                   <a:srgbClr val="0D9488"/>
                 </a:solidFill>
                 <a:latin typeface="맑은 고딕"/>
+                <a:ea typeface="맑은 고딕"/>
+                <a:cs typeface="맑은 고딕"/>
               </a:rPr>
               <a:t>●  </a:t>
             </a:r>
@@ -5217,6 +5233,8 @@
                   <a:srgbClr val="222733"/>
                 </a:solidFill>
                 <a:latin typeface="맑은 고딕"/>
+                <a:ea typeface="맑은 고딕"/>
+                <a:cs typeface="맑은 고딕"/>
               </a:rPr>
               <a:t>minikube start → kubectl apply -f deployment.yaml</a:t>
             </a:r>
@@ -5233,6 +5251,8 @@
                   <a:srgbClr val="0D9488"/>
                 </a:solidFill>
                 <a:latin typeface="맑은 고딕"/>
+                <a:ea typeface="맑은 고딕"/>
+                <a:cs typeface="맑은 고딕"/>
               </a:rPr>
               <a:t>●  </a:t>
             </a:r>
@@ -5242,6 +5262,8 @@
                   <a:srgbClr val="222733"/>
                 </a:solidFill>
                 <a:latin typeface="맑은 고딕"/>
+                <a:ea typeface="맑은 고딕"/>
+                <a:cs typeface="맑은 고딕"/>
               </a:rPr>
               <a:t>kubectl get pods 로 2개 Running 확인</a:t>
             </a:r>
@@ -5258,6 +5280,8 @@
                   <a:srgbClr val="0D9488"/>
                 </a:solidFill>
                 <a:latin typeface="맑은 고딕"/>
+                <a:ea typeface="맑은 고딕"/>
+                <a:cs typeface="맑은 고딕"/>
               </a:rPr>
               <a:t>●  </a:t>
             </a:r>
@@ -5267,6 +5291,8 @@
                   <a:srgbClr val="222733"/>
                 </a:solidFill>
                 <a:latin typeface="맑은 고딕"/>
+                <a:ea typeface="맑은 고딕"/>
+                <a:cs typeface="맑은 고딕"/>
               </a:rPr>
               <a:t>kubectl delete pod {파드이름 중 하나} 로 하나를 강제 삭제해보기</a:t>
             </a:r>
@@ -5283,6 +5309,8 @@
                   <a:srgbClr val="0D9488"/>
                 </a:solidFill>
                 <a:latin typeface="맑은 고딕"/>
+                <a:ea typeface="맑은 고딕"/>
+                <a:cs typeface="맑은 고딕"/>
               </a:rPr>
               <a:t>●  </a:t>
             </a:r>
@@ -5292,6 +5320,8 @@
                   <a:srgbClr val="222733"/>
                 </a:solidFill>
                 <a:latin typeface="맑은 고딕"/>
+                <a:ea typeface="맑은 고딕"/>
+                <a:cs typeface="맑은 고딕"/>
               </a:rPr>
               <a:t>kubectl get pods 다시 확인 → 자동으로 새 Pod가 생겨 다시 2개인지 확인 (미리보기)</a:t>
             </a:r>
@@ -5327,6 +5357,8 @@
                   <a:srgbClr val="5B6373"/>
                 </a:solidFill>
                 <a:latin typeface="맑은 고딕"/>
+                <a:ea typeface="맑은 고딕"/>
+                <a:cs typeface="맑은 고딕"/>
               </a:rPr>
               <a:t>클라우드인프라관리  ·  4주차 3차시</a:t>
             </a:r>
@@ -5362,6 +5394,8 @@
                   <a:srgbClr val="5B6373"/>
                 </a:solidFill>
                 <a:latin typeface="맑은 고딕"/>
+                <a:ea typeface="맑은 고딕"/>
+                <a:cs typeface="맑은 고딕"/>
               </a:rPr>
               <a:t>11 / 13</a:t>
             </a:r>
@@ -5547,6 +5581,8 @@
                   <a:srgbClr val="FFFFFF"/>
                 </a:solidFill>
                 <a:latin typeface="맑은 고딕"/>
+                <a:ea typeface="맑은 고딕"/>
+                <a:cs typeface="맑은 고딕"/>
               </a:rPr>
               <a:t>오늘의 정리</a:t>
             </a:r>
@@ -5600,6 +5636,8 @@
                   <a:srgbClr val="14213D"/>
                 </a:solidFill>
                 <a:latin typeface="맑은 고딕"/>
+                <a:ea typeface="맑은 고딕"/>
+                <a:cs typeface="맑은 고딕"/>
               </a:rPr>
               <a:t>1</a:t>
             </a:r>
@@ -5635,6 +5673,8 @@
                   <a:srgbClr val="FFFFFF"/>
                 </a:solidFill>
                 <a:latin typeface="맑은 고딕"/>
+                <a:ea typeface="맑은 고딕"/>
+                <a:cs typeface="맑은 고딕"/>
               </a:rPr>
               <a:t>Deployment = "항상 N개여야 한다"를 선언하면 K8s가 유지해준다</a:t>
             </a:r>
@@ -5688,6 +5728,8 @@
                   <a:srgbClr val="14213D"/>
                 </a:solidFill>
                 <a:latin typeface="맑은 고딕"/>
+                <a:ea typeface="맑은 고딕"/>
+                <a:cs typeface="맑은 고딕"/>
               </a:rPr>
               <a:t>2</a:t>
             </a:r>
@@ -5723,6 +5765,8 @@
                   <a:srgbClr val="FFFFFF"/>
                 </a:solidFill>
                 <a:latin typeface="맑은 고딕"/>
+                <a:ea typeface="맑은 고딕"/>
+                <a:cs typeface="맑은 고딕"/>
               </a:rPr>
               <a:t>YAML = apiVersion·kind·metadata·spec으로 원하는 상태를 적는 문서</a:t>
             </a:r>
@@ -5864,6 +5908,8 @@
                   <a:srgbClr val="FFFFFF"/>
                 </a:solidFill>
                 <a:latin typeface="맑은 고딕"/>
+                <a:ea typeface="맑은 고딕"/>
+                <a:cs typeface="맑은 고딕"/>
               </a:rPr>
               <a:t>다음 주 예고</a:t>
             </a:r>
@@ -5899,6 +5945,8 @@
                   <a:srgbClr val="14B8A6"/>
                 </a:solidFill>
                 <a:latin typeface="맑은 고딕"/>
+                <a:ea typeface="맑은 고딕"/>
+                <a:cs typeface="맑은 고딕"/>
               </a:rPr>
               <a:t>다음 차시 예고 — 5주차 — K8s Service와 내부 통신 네트워크</a:t>
             </a:r>
@@ -5934,6 +5982,8 @@
                   <a:srgbClr val="FFFFFF"/>
                 </a:solidFill>
                 <a:latin typeface="맑은 고딕"/>
+                <a:ea typeface="맑은 고딕"/>
+                <a:cs typeface="맑은 고딕"/>
               </a:rPr>
               <a:t>지금은 Pod가 여러 개라도 외부에서 어떻게 접속해야 할지 애매합니다. 다음 주엔 Service로 여러 Pod에 안정적으로 접속하는 방법을 배웁니다.</a:t>
             </a:r>
@@ -6119,6 +6169,8 @@
                   <a:srgbClr val="14B8A6"/>
                 </a:solidFill>
                 <a:latin typeface="맑은 고딕"/>
+                <a:ea typeface="맑은 고딕"/>
+                <a:cs typeface="맑은 고딕"/>
               </a:rPr>
               <a:t>4주차를 마치며</a:t>
             </a:r>
@@ -6154,6 +6206,8 @@
                   <a:srgbClr val="FFFFFF"/>
                 </a:solidFill>
                 <a:latin typeface="맑은 고딕"/>
+                <a:ea typeface="맑은 고딕"/>
+                <a:cs typeface="맑은 고딕"/>
               </a:rPr>
               <a:t>수고하셨습니다!</a:t>
             </a:r>
@@ -6193,6 +6247,8 @@
                   <a:srgbClr val="C9D3E6"/>
                 </a:solidFill>
                 <a:latin typeface="맑은 고딕"/>
+                <a:ea typeface="맑은 고딕"/>
+                <a:cs typeface="맑은 고딕"/>
               </a:rPr>
               <a:t>K8s 아키텍처부터 Pod, Deployment까지 — Kubernetes의 첫 관문을 잘 넘으셨습니다.</a:t>
             </a:r>
@@ -6334,6 +6390,8 @@
                   <a:srgbClr val="14B8A6"/>
                 </a:solidFill>
                 <a:latin typeface="맑은 고딕"/>
+                <a:ea typeface="맑은 고딕"/>
+                <a:cs typeface="맑은 고딕"/>
               </a:rPr>
               <a:t>SESSION OVERVIEW</a:t>
             </a:r>
@@ -6369,6 +6427,8 @@
                   <a:srgbClr val="FFFFFF"/>
                 </a:solidFill>
                 <a:latin typeface="맑은 고딕"/>
+                <a:ea typeface="맑은 고딕"/>
+                <a:cs typeface="맑은 고딕"/>
               </a:rPr>
               <a:t>오늘의 학습 목표</a:t>
             </a:r>
@@ -6408,6 +6468,8 @@
                   <a:srgbClr val="222733"/>
                 </a:solidFill>
                 <a:latin typeface="맑은 고딕"/>
+                <a:ea typeface="맑은 고딕"/>
+                <a:cs typeface="맑은 고딕"/>
               </a:rPr>
               <a:t>1.  Deployment가 Pod를 어떻게 자동 관리하는지 이해한다</a:t>
             </a:r>
@@ -6424,6 +6486,8 @@
                   <a:srgbClr val="222733"/>
                 </a:solidFill>
                 <a:latin typeface="맑은 고딕"/>
+                <a:ea typeface="맑은 고딕"/>
+                <a:cs typeface="맑은 고딕"/>
               </a:rPr>
               <a:t>2.  YAML 파일의 기본 구조를 읽고 쓸 수 있다</a:t>
             </a:r>
@@ -6440,6 +6504,8 @@
                   <a:srgbClr val="222733"/>
                 </a:solidFill>
                 <a:latin typeface="맑은 고딕"/>
+                <a:ea typeface="맑은 고딕"/>
+                <a:cs typeface="맑은 고딕"/>
               </a:rPr>
               <a:t>3.  Deployment YAML을 직접 작성해 클러스터에 배포한다</a:t>
             </a:r>
@@ -6475,6 +6541,8 @@
                   <a:srgbClr val="5B6373"/>
                 </a:solidFill>
                 <a:latin typeface="맑은 고딕"/>
+                <a:ea typeface="맑은 고딕"/>
+                <a:cs typeface="맑은 고딕"/>
               </a:rPr>
               <a:t>클라우드인프라관리  ·  4주차 3차시</a:t>
             </a:r>
@@ -6510,6 +6578,8 @@
                   <a:srgbClr val="5B6373"/>
                 </a:solidFill>
                 <a:latin typeface="맑은 고딕"/>
+                <a:ea typeface="맑은 고딕"/>
+                <a:cs typeface="맑은 고딕"/>
               </a:rPr>
               <a:t>02 / 13</a:t>
             </a:r>
@@ -6695,6 +6765,8 @@
                   <a:srgbClr val="14B8A6"/>
                 </a:solidFill>
                 <a:latin typeface="맑은 고딕"/>
+                <a:ea typeface="맑은 고딕"/>
+                <a:cs typeface="맑은 고딕"/>
               </a:rPr>
               <a:t>SESSION OVERVIEW</a:t>
             </a:r>
@@ -6730,6 +6802,8 @@
                   <a:srgbClr val="FFFFFF"/>
                 </a:solidFill>
                 <a:latin typeface="맑은 고딕"/>
+                <a:ea typeface="맑은 고딕"/>
+                <a:cs typeface="맑은 고딕"/>
               </a:rPr>
               <a:t>오늘의 진행 순서</a:t>
             </a:r>
@@ -6941,6 +7015,8 @@
                   <a:srgbClr val="FFFFFF"/>
                 </a:solidFill>
                 <a:latin typeface="맑은 고딕"/>
+                <a:ea typeface="맑은 고딕"/>
+                <a:cs typeface="맑은 고딕"/>
               </a:rPr>
               <a:t>1</a:t>
             </a:r>
@@ -7024,6 +7100,8 @@
                   <a:srgbClr val="14213D"/>
                 </a:solidFill>
                 <a:latin typeface="맑은 고딕"/>
+                <a:ea typeface="맑은 고딕"/>
+                <a:cs typeface="맑은 고딕"/>
               </a:rPr>
               <a:t>개념 설명</a:t>
             </a:r>
@@ -7063,6 +7141,8 @@
                   <a:srgbClr val="222733"/>
                 </a:solidFill>
                 <a:latin typeface="맑은 고딕"/>
+                <a:ea typeface="맑은 고딕"/>
+                <a:cs typeface="맑은 고딕"/>
               </a:rPr>
               <a:t>강의자료 기반 직접 강의</a:t>
             </a:r>
@@ -7142,6 +7222,8 @@
                   <a:srgbClr val="FFFFFF"/>
                 </a:solidFill>
                 <a:latin typeface="맑은 고딕"/>
+                <a:ea typeface="맑은 고딕"/>
+                <a:cs typeface="맑은 고딕"/>
               </a:rPr>
               <a:t>2</a:t>
             </a:r>
@@ -7225,6 +7307,8 @@
                   <a:srgbClr val="14213D"/>
                 </a:solidFill>
                 <a:latin typeface="맑은 고딕"/>
+                <a:ea typeface="맑은 고딕"/>
+                <a:cs typeface="맑은 고딕"/>
               </a:rPr>
               <a:t>Killercoda</a:t>
             </a:r>
@@ -7264,6 +7348,8 @@
                   <a:srgbClr val="222733"/>
                 </a:solidFill>
                 <a:latin typeface="맑은 고딕"/>
+                <a:ea typeface="맑은 고딕"/>
+                <a:cs typeface="맑은 고딕"/>
               </a:rPr>
               <a:t>Deployment 선언 실행</a:t>
             </a:r>
@@ -7343,6 +7429,8 @@
                   <a:srgbClr val="FFFFFF"/>
                 </a:solidFill>
                 <a:latin typeface="맑은 고딕"/>
+                <a:ea typeface="맑은 고딕"/>
+                <a:cs typeface="맑은 고딕"/>
               </a:rPr>
               <a:t>3</a:t>
             </a:r>
@@ -7426,6 +7514,8 @@
                   <a:srgbClr val="14213D"/>
                 </a:solidFill>
                 <a:latin typeface="맑은 고딕"/>
+                <a:ea typeface="맑은 고딕"/>
+                <a:cs typeface="맑은 고딕"/>
               </a:rPr>
               <a:t>VM 안내</a:t>
             </a:r>
@@ -7465,6 +7555,8 @@
                   <a:srgbClr val="222733"/>
                 </a:solidFill>
                 <a:latin typeface="맑은 고딕"/>
+                <a:ea typeface="맑은 고딕"/>
+                <a:cs typeface="맑은 고딕"/>
               </a:rPr>
               <a:t>minikube에 배포</a:t>
             </a:r>
@@ -7544,6 +7636,8 @@
                   <a:srgbClr val="FFFFFF"/>
                 </a:solidFill>
                 <a:latin typeface="맑은 고딕"/>
+                <a:ea typeface="맑은 고딕"/>
+                <a:cs typeface="맑은 고딕"/>
               </a:rPr>
               <a:t>4</a:t>
             </a:r>
@@ -7627,6 +7721,8 @@
                   <a:srgbClr val="14213D"/>
                 </a:solidFill>
                 <a:latin typeface="맑은 고딕"/>
+                <a:ea typeface="맑은 고딕"/>
+                <a:cs typeface="맑은 고딕"/>
               </a:rPr>
               <a:t>결과 제출</a:t>
             </a:r>
@@ -7666,6 +7762,8 @@
                   <a:srgbClr val="222733"/>
                 </a:solidFill>
                 <a:latin typeface="맑은 고딕"/>
+                <a:ea typeface="맑은 고딕"/>
+                <a:cs typeface="맑은 고딕"/>
               </a:rPr>
               <a:t>체크리스트 제출</a:t>
             </a:r>
@@ -7701,6 +7799,8 @@
                   <a:srgbClr val="5B6373"/>
                 </a:solidFill>
                 <a:latin typeface="맑은 고딕"/>
+                <a:ea typeface="맑은 고딕"/>
+                <a:cs typeface="맑은 고딕"/>
               </a:rPr>
               <a:t>클라우드인프라관리  ·  4주차 3차시</a:t>
             </a:r>
@@ -7736,6 +7836,8 @@
                   <a:srgbClr val="5B6373"/>
                 </a:solidFill>
                 <a:latin typeface="맑은 고딕"/>
+                <a:ea typeface="맑은 고딕"/>
+                <a:cs typeface="맑은 고딕"/>
               </a:rPr>
               <a:t>03 / 13</a:t>
             </a:r>
@@ -7939,6 +8041,8 @@
                   <a:srgbClr val="14213D"/>
                 </a:solidFill>
                 <a:latin typeface="맑은 고딕"/>
+                <a:ea typeface="맑은 고딕"/>
+                <a:cs typeface="맑은 고딕"/>
               </a:rPr>
               <a:t>PART 01</a:t>
             </a:r>
@@ -7974,6 +8078,8 @@
                   <a:srgbClr val="FFFFFF"/>
                 </a:solidFill>
                 <a:latin typeface="맑은 고딕"/>
+                <a:ea typeface="맑은 고딕"/>
+                <a:cs typeface="맑은 고딕"/>
               </a:rPr>
               <a:t>Deployment란?</a:t>
             </a:r>
@@ -8009,6 +8115,8 @@
                   <a:srgbClr val="C9D3E6"/>
                 </a:solidFill>
                 <a:latin typeface="맑은 고딕"/>
+                <a:ea typeface="맑은 고딕"/>
+                <a:cs typeface="맑은 고딕"/>
               </a:rPr>
               <a:t>원하는 개수를 자동으로 유지</a:t>
             </a:r>
@@ -8168,6 +8276,8 @@
                   <a:srgbClr val="14213D"/>
                 </a:solidFill>
                 <a:latin typeface="맑은 고딕"/>
+                <a:ea typeface="맑은 고딕"/>
+                <a:cs typeface="맑은 고딕"/>
               </a:rPr>
               <a:t>01</a:t>
             </a:r>
@@ -8203,6 +8313,8 @@
                   <a:srgbClr val="14B8A6"/>
                 </a:solidFill>
                 <a:latin typeface="맑은 고딕"/>
+                <a:ea typeface="맑은 고딕"/>
+                <a:cs typeface="맑은 고딕"/>
               </a:rPr>
               <a:t>PART 1 · Deployment란?</a:t>
             </a:r>
@@ -8238,6 +8350,8 @@
                   <a:srgbClr val="FFFFFF"/>
                 </a:solidFill>
                 <a:latin typeface="맑은 고딕"/>
+                <a:ea typeface="맑은 고딕"/>
+                <a:cs typeface="맑은 고딕"/>
               </a:rPr>
               <a:t>선언하면 K8s가 유지해준다</a:t>
             </a:r>
@@ -8277,6 +8391,8 @@
                   <a:srgbClr val="0D9488"/>
                 </a:solidFill>
                 <a:latin typeface="맑은 고딕"/>
+                <a:ea typeface="맑은 고딕"/>
+                <a:cs typeface="맑은 고딕"/>
               </a:rPr>
               <a:t>●  </a:t>
             </a:r>
@@ -8286,6 +8402,8 @@
                   <a:srgbClr val="222733"/>
                 </a:solidFill>
                 <a:latin typeface="맑은 고딕"/>
+                <a:ea typeface="맑은 고딕"/>
+                <a:cs typeface="맑은 고딕"/>
               </a:rPr>
               <a:t>"nginx Pod가 항상 2개 떠 있어야 한다"고 선언 (명령이 아니라 선언!)</a:t>
             </a:r>
@@ -8302,6 +8420,8 @@
                   <a:srgbClr val="0D9488"/>
                 </a:solidFill>
                 <a:latin typeface="맑은 고딕"/>
+                <a:ea typeface="맑은 고딕"/>
+                <a:cs typeface="맑은 고딕"/>
               </a:rPr>
               <a:t>●  </a:t>
             </a:r>
@@ -8311,6 +8431,8 @@
                   <a:srgbClr val="222733"/>
                 </a:solidFill>
                 <a:latin typeface="맑은 고딕"/>
+                <a:ea typeface="맑은 고딕"/>
+                <a:cs typeface="맑은 고딕"/>
               </a:rPr>
               <a:t>Deployment가 내부적으로 ReplicaSet을 만들어 그 개수를 계속 감시</a:t>
             </a:r>
@@ -8327,6 +8449,8 @@
                   <a:srgbClr val="0D9488"/>
                 </a:solidFill>
                 <a:latin typeface="맑은 고딕"/>
+                <a:ea typeface="맑은 고딕"/>
+                <a:cs typeface="맑은 고딕"/>
               </a:rPr>
               <a:t>●  </a:t>
             </a:r>
@@ -8336,6 +8460,8 @@
                   <a:srgbClr val="222733"/>
                 </a:solidFill>
                 <a:latin typeface="맑은 고딕"/>
+                <a:ea typeface="맑은 고딕"/>
+                <a:cs typeface="맑은 고딕"/>
               </a:rPr>
               <a:t>Pod 하나가 죽으면 ReplicaSet이 즉시 새 Pod를 만들어 개수를 다시 채움</a:t>
             </a:r>
@@ -8415,6 +8541,8 @@
                   <a:srgbClr val="FFFFFF"/>
                 </a:solidFill>
                 <a:latin typeface="맑은 고딕"/>
+                <a:ea typeface="맑은 고딕"/>
+                <a:cs typeface="맑은 고딕"/>
               </a:rPr>
               <a:t>💡  '명령'이 아니라 '선언'</a:t>
             </a:r>
@@ -8450,6 +8578,8 @@
                   <a:srgbClr val="FFFFFF"/>
                 </a:solidFill>
                 <a:latin typeface="맑은 고딕"/>
+                <a:ea typeface="맑은 고딕"/>
+                <a:cs typeface="맑은 고딕"/>
               </a:rPr>
               <a:t>"지금 2개 만들어라"가 아니라 "항상 2개여야 한다" — 이게 K8s의 핵심 철학(선언적 관리)</a:t>
             </a:r>
@@ -8485,6 +8615,8 @@
                   <a:srgbClr val="5B6373"/>
                 </a:solidFill>
                 <a:latin typeface="맑은 고딕"/>
+                <a:ea typeface="맑은 고딕"/>
+                <a:cs typeface="맑은 고딕"/>
               </a:rPr>
               <a:t>클라우드인프라관리  ·  4주차 3차시</a:t>
             </a:r>
@@ -8520,6 +8652,8 @@
                   <a:srgbClr val="5B6373"/>
                 </a:solidFill>
                 <a:latin typeface="맑은 고딕"/>
+                <a:ea typeface="맑은 고딕"/>
+                <a:cs typeface="맑은 고딕"/>
               </a:rPr>
               <a:t>05 / 13</a:t>
             </a:r>
@@ -8723,6 +8857,8 @@
                   <a:srgbClr val="14213D"/>
                 </a:solidFill>
                 <a:latin typeface="맑은 고딕"/>
+                <a:ea typeface="맑은 고딕"/>
+                <a:cs typeface="맑은 고딕"/>
               </a:rPr>
               <a:t>PART 02</a:t>
             </a:r>
@@ -8758,6 +8894,8 @@
                   <a:srgbClr val="FFFFFF"/>
                 </a:solidFill>
                 <a:latin typeface="맑은 고딕"/>
+                <a:ea typeface="맑은 고딕"/>
+                <a:cs typeface="맑은 고딕"/>
               </a:rPr>
               <a:t>YAML로 선언하기</a:t>
             </a:r>
@@ -8793,6 +8931,8 @@
                   <a:srgbClr val="C9D3E6"/>
                 </a:solidFill>
                 <a:latin typeface="맑은 고딕"/>
+                <a:ea typeface="맑은 고딕"/>
+                <a:cs typeface="맑은 고딕"/>
               </a:rPr>
               <a:t>apiVersion · kind · metadata · spec</a:t>
             </a:r>
@@ -8952,6 +9092,8 @@
                   <a:srgbClr val="14213D"/>
                 </a:solidFill>
                 <a:latin typeface="맑은 고딕"/>
+                <a:ea typeface="맑은 고딕"/>
+                <a:cs typeface="맑은 고딕"/>
               </a:rPr>
               <a:t>02</a:t>
             </a:r>
@@ -8987,6 +9129,8 @@
                   <a:srgbClr val="14B8A6"/>
                 </a:solidFill>
                 <a:latin typeface="맑은 고딕"/>
+                <a:ea typeface="맑은 고딕"/>
+                <a:cs typeface="맑은 고딕"/>
               </a:rPr>
               <a:t>PART 2 · YAML로 선언하기</a:t>
             </a:r>
@@ -9022,6 +9166,8 @@
                   <a:srgbClr val="FFFFFF"/>
                 </a:solidFill>
                 <a:latin typeface="맑은 고딕"/>
+                <a:ea typeface="맑은 고딕"/>
+                <a:cs typeface="맑은 고딕"/>
               </a:rPr>
               <a:t>YAML 기본 구조</a:t>
             </a:r>
@@ -9061,6 +9207,8 @@
                   <a:srgbClr val="0D9488"/>
                 </a:solidFill>
                 <a:latin typeface="맑은 고딕"/>
+                <a:ea typeface="맑은 고딕"/>
+                <a:cs typeface="맑은 고딕"/>
               </a:rPr>
               <a:t>●  </a:t>
             </a:r>
@@ -9070,6 +9218,8 @@
                   <a:srgbClr val="222733"/>
                 </a:solidFill>
                 <a:latin typeface="맑은 고딕"/>
+                <a:ea typeface="맑은 고딕"/>
+                <a:cs typeface="맑은 고딕"/>
               </a:rPr>
               <a:t>apiVersion — 어떤 버전의 K8s API를 쓸지 (Deployment는 apps/v1)</a:t>
             </a:r>
@@ -9086,6 +9236,8 @@
                   <a:srgbClr val="0D9488"/>
                 </a:solidFill>
                 <a:latin typeface="맑은 고딕"/>
+                <a:ea typeface="맑은 고딕"/>
+                <a:cs typeface="맑은 고딕"/>
               </a:rPr>
               <a:t>●  </a:t>
             </a:r>
@@ -9095,6 +9247,8 @@
                   <a:srgbClr val="222733"/>
                 </a:solidFill>
                 <a:latin typeface="맑은 고딕"/>
+                <a:ea typeface="맑은 고딕"/>
+                <a:cs typeface="맑은 고딕"/>
               </a:rPr>
               <a:t>kind — 무엇을 만들지 (Deployment, Pod, Service 등)</a:t>
             </a:r>
@@ -9111,6 +9265,8 @@
                   <a:srgbClr val="0D9488"/>
                 </a:solidFill>
                 <a:latin typeface="맑은 고딕"/>
+                <a:ea typeface="맑은 고딕"/>
+                <a:cs typeface="맑은 고딕"/>
               </a:rPr>
               <a:t>●  </a:t>
             </a:r>
@@ -9120,6 +9276,8 @@
                   <a:srgbClr val="222733"/>
                 </a:solidFill>
                 <a:latin typeface="맑은 고딕"/>
+                <a:ea typeface="맑은 고딕"/>
+                <a:cs typeface="맑은 고딕"/>
               </a:rPr>
               <a:t>metadata — 이름, 라벨 등 부가 정보</a:t>
             </a:r>
@@ -9136,6 +9294,8 @@
                   <a:srgbClr val="0D9488"/>
                 </a:solidFill>
                 <a:latin typeface="맑은 고딕"/>
+                <a:ea typeface="맑은 고딕"/>
+                <a:cs typeface="맑은 고딕"/>
               </a:rPr>
               <a:t>●  </a:t>
             </a:r>
@@ -9145,6 +9305,8 @@
                   <a:srgbClr val="222733"/>
                 </a:solidFill>
                 <a:latin typeface="맑은 고딕"/>
+                <a:ea typeface="맑은 고딕"/>
+                <a:cs typeface="맑은 고딕"/>
               </a:rPr>
               <a:t>spec — 실제 원하는 상태를 적는 핵심 부분 (replicas, 이미지 등)</a:t>
             </a:r>
@@ -9180,6 +9342,8 @@
                   <a:srgbClr val="5B6373"/>
                 </a:solidFill>
                 <a:latin typeface="맑은 고딕"/>
+                <a:ea typeface="맑은 고딕"/>
+                <a:cs typeface="맑은 고딕"/>
               </a:rPr>
               <a:t>클라우드인프라관리  ·  4주차 3차시</a:t>
             </a:r>
@@ -9215,6 +9379,8 @@
                   <a:srgbClr val="5B6373"/>
                 </a:solidFill>
                 <a:latin typeface="맑은 고딕"/>
+                <a:ea typeface="맑은 고딕"/>
+                <a:cs typeface="맑은 고딕"/>
               </a:rPr>
               <a:t>08 / 13</a:t>
             </a:r>
@@ -9418,6 +9584,8 @@
                   <a:srgbClr val="14213D"/>
                 </a:solidFill>
                 <a:latin typeface="맑은 고딕"/>
+                <a:ea typeface="맑은 고딕"/>
+                <a:cs typeface="맑은 고딕"/>
               </a:rPr>
               <a:t>02</a:t>
             </a:r>
@@ -9453,6 +9621,8 @@
                   <a:srgbClr val="14B8A6"/>
                 </a:solidFill>
                 <a:latin typeface="맑은 고딕"/>
+                <a:ea typeface="맑은 고딕"/>
+                <a:cs typeface="맑은 고딕"/>
               </a:rPr>
               <a:t>PART 2 · YAML로 선언하기</a:t>
             </a:r>
@@ -9488,6 +9658,8 @@
                   <a:srgbClr val="FFFFFF"/>
                 </a:solidFill>
                 <a:latin typeface="맑은 고딕"/>
+                <a:ea typeface="맑은 고딕"/>
+                <a:cs typeface="맑은 고딕"/>
               </a:rPr>
               <a:t>deployment.yaml 예시</a:t>
             </a:r>
@@ -9527,6 +9699,8 @@
                   <a:srgbClr val="0D9488"/>
                 </a:solidFill>
                 <a:latin typeface="맑은 고딕"/>
+                <a:ea typeface="맑은 고딕"/>
+                <a:cs typeface="맑은 고딕"/>
               </a:rPr>
               <a:t>●  </a:t>
             </a:r>
@@ -9536,6 +9710,8 @@
                   <a:srgbClr val="222733"/>
                 </a:solidFill>
                 <a:latin typeface="맑은 고딕"/>
+                <a:ea typeface="맑은 고딕"/>
+                <a:cs typeface="맑은 고딕"/>
               </a:rPr>
               <a:t>apiVersion: apps/v1</a:t>
             </a:r>
@@ -9552,6 +9728,8 @@
                   <a:srgbClr val="0D9488"/>
                 </a:solidFill>
                 <a:latin typeface="맑은 고딕"/>
+                <a:ea typeface="맑은 고딕"/>
+                <a:cs typeface="맑은 고딕"/>
               </a:rPr>
               <a:t>●  </a:t>
             </a:r>
@@ -9561,6 +9739,8 @@
                   <a:srgbClr val="222733"/>
                 </a:solidFill>
                 <a:latin typeface="맑은 고딕"/>
+                <a:ea typeface="맑은 고딕"/>
+                <a:cs typeface="맑은 고딕"/>
               </a:rPr>
               <a:t>kind: Deployment</a:t>
             </a:r>
@@ -9577,6 +9757,8 @@
                   <a:srgbClr val="0D9488"/>
                 </a:solidFill>
                 <a:latin typeface="맑은 고딕"/>
+                <a:ea typeface="맑은 고딕"/>
+                <a:cs typeface="맑은 고딕"/>
               </a:rPr>
               <a:t>●  </a:t>
             </a:r>
@@ -9586,6 +9768,8 @@
                   <a:srgbClr val="222733"/>
                 </a:solidFill>
                 <a:latin typeface="맑은 고딕"/>
+                <a:ea typeface="맑은 고딕"/>
+                <a:cs typeface="맑은 고딕"/>
               </a:rPr>
               <a:t>metadata: name: myapp</a:t>
             </a:r>
@@ -9602,6 +9786,8 @@
                   <a:srgbClr val="0D9488"/>
                 </a:solidFill>
                 <a:latin typeface="맑은 고딕"/>
+                <a:ea typeface="맑은 고딕"/>
+                <a:cs typeface="맑은 고딕"/>
               </a:rPr>
               <a:t>●  </a:t>
             </a:r>
@@ -9611,6 +9797,8 @@
                   <a:srgbClr val="222733"/>
                 </a:solidFill>
                 <a:latin typeface="맑은 고딕"/>
+                <a:ea typeface="맑은 고딕"/>
+                <a:cs typeface="맑은 고딕"/>
               </a:rPr>
               <a:t>spec: replicas: 2</a:t>
             </a:r>
@@ -9627,6 +9815,8 @@
                   <a:srgbClr val="0D9488"/>
                 </a:solidFill>
                 <a:latin typeface="맑은 고딕"/>
+                <a:ea typeface="맑은 고딕"/>
+                <a:cs typeface="맑은 고딕"/>
               </a:rPr>
               <a:t>●  </a:t>
             </a:r>
@@ -9636,6 +9826,8 @@
                   <a:srgbClr val="222733"/>
                 </a:solidFill>
                 <a:latin typeface="맑은 고딕"/>
+                <a:ea typeface="맑은 고딕"/>
+                <a:cs typeface="맑은 고딕"/>
               </a:rPr>
               <a:t>spec.template.spec.containers: - name: myapp, image: nginx</a:t>
             </a:r>
@@ -9671,6 +9863,8 @@
                   <a:srgbClr val="5B6373"/>
                 </a:solidFill>
                 <a:latin typeface="맑은 고딕"/>
+                <a:ea typeface="맑은 고딕"/>
+                <a:cs typeface="맑은 고딕"/>
               </a:rPr>
               <a:t>클라우드인프라관리  ·  4주차 3차시</a:t>
             </a:r>
@@ -9706,6 +9900,8 @@
                   <a:srgbClr val="5B6373"/>
                 </a:solidFill>
                 <a:latin typeface="맑은 고딕"/>
+                <a:ea typeface="맑은 고딕"/>
+                <a:cs typeface="맑은 고딕"/>
               </a:rPr>
               <a:t>09 / 13</a:t>
             </a:r>
@@ -9909,6 +10105,8 @@
                   <a:srgbClr val="14213D"/>
                 </a:solidFill>
                 <a:latin typeface="맑은 고딕"/>
+                <a:ea typeface="맑은 고딕"/>
+                <a:cs typeface="맑은 고딕"/>
               </a:rPr>
               <a:t>03</a:t>
             </a:r>
@@ -9944,6 +10142,8 @@
                   <a:srgbClr val="14B8A6"/>
                 </a:solidFill>
                 <a:latin typeface="맑은 고딕"/>
+                <a:ea typeface="맑은 고딕"/>
+                <a:cs typeface="맑은 고딕"/>
               </a:rPr>
               <a:t>실습 안내</a:t>
             </a:r>
@@ -9979,6 +10179,8 @@
                   <a:srgbClr val="FFFFFF"/>
                 </a:solidFill>
                 <a:latin typeface="맑은 고딕"/>
+                <a:ea typeface="맑은 고딕"/>
+                <a:cs typeface="맑은 고딕"/>
               </a:rPr>
               <a:t>Killercoda — Deployment 선언 실행</a:t>
             </a:r>
@@ -10018,6 +10220,8 @@
                   <a:srgbClr val="0D9488"/>
                 </a:solidFill>
                 <a:latin typeface="맑은 고딕"/>
+                <a:ea typeface="맑은 고딕"/>
+                <a:cs typeface="맑은 고딕"/>
               </a:rPr>
               <a:t>●  </a:t>
             </a:r>
@@ -10027,6 +10231,8 @@
                   <a:srgbClr val="222733"/>
                 </a:solidFill>
                 <a:latin typeface="맑은 고딕"/>
+                <a:ea typeface="맑은 고딕"/>
+                <a:cs typeface="맑은 고딕"/>
               </a:rPr>
               <a:t>kubectl get nodes  — 지난 시간 복습</a:t>
             </a:r>
@@ -10043,6 +10249,8 @@
                   <a:srgbClr val="0D9488"/>
                 </a:solidFill>
                 <a:latin typeface="맑은 고딕"/>
+                <a:ea typeface="맑은 고딕"/>
+                <a:cs typeface="맑은 고딕"/>
               </a:rPr>
               <a:t>●  </a:t>
             </a:r>
@@ -10052,6 +10260,8 @@
                   <a:srgbClr val="222733"/>
                 </a:solidFill>
                 <a:latin typeface="맑은 고딕"/>
+                <a:ea typeface="맑은 고딕"/>
+                <a:cs typeface="맑은 고딕"/>
               </a:rPr>
               <a:t>deployment.yaml 작성 (replicas: 2, image: nginx)</a:t>
             </a:r>
@@ -10068,6 +10278,8 @@
                   <a:srgbClr val="0D9488"/>
                 </a:solidFill>
                 <a:latin typeface="맑은 고딕"/>
+                <a:ea typeface="맑은 고딕"/>
+                <a:cs typeface="맑은 고딕"/>
               </a:rPr>
               <a:t>●  </a:t>
             </a:r>
@@ -10077,6 +10289,8 @@
                   <a:srgbClr val="222733"/>
                 </a:solidFill>
                 <a:latin typeface="맑은 고딕"/>
+                <a:ea typeface="맑은 고딕"/>
+                <a:cs typeface="맑은 고딕"/>
               </a:rPr>
               <a:t>kubectl apply -f deployment.yaml</a:t>
             </a:r>
@@ -10093,6 +10307,8 @@
                   <a:srgbClr val="0D9488"/>
                 </a:solidFill>
                 <a:latin typeface="맑은 고딕"/>
+                <a:ea typeface="맑은 고딕"/>
+                <a:cs typeface="맑은 고딕"/>
               </a:rPr>
               <a:t>●  </a:t>
             </a:r>
@@ -10102,6 +10318,8 @@
                   <a:srgbClr val="222733"/>
                 </a:solidFill>
                 <a:latin typeface="맑은 고딕"/>
+                <a:ea typeface="맑은 고딕"/>
+                <a:cs typeface="맑은 고딕"/>
               </a:rPr>
               <a:t>kubectl get pods -w  — Pod 2개가 뜨는 과정을 실시간으로 관찰</a:t>
             </a:r>
@@ -10137,6 +10355,8 @@
                   <a:srgbClr val="5B6373"/>
                 </a:solidFill>
                 <a:latin typeface="맑은 고딕"/>
+                <a:ea typeface="맑은 고딕"/>
+                <a:cs typeface="맑은 고딕"/>
               </a:rPr>
               <a:t>클라우드인프라관리  ·  4주차 3차시</a:t>
             </a:r>
@@ -10172,6 +10392,8 @@
                   <a:srgbClr val="5B6373"/>
                 </a:solidFill>
                 <a:latin typeface="맑은 고딕"/>
+                <a:ea typeface="맑은 고딕"/>
+                <a:cs typeface="맑은 고딕"/>
               </a:rPr>
               <a:t>10 / 13</a:t>
             </a:r>
